--- a/dist/초1/수학/수와연산/초1_수학_수와연산_01_9까지의수_학생용.pptx
+++ b/dist/초1/수학/수와연산/초1_수학_수와연산_01_9까지의수_학생용.pptx
@@ -119,13 +119,13 @@
   <p:extLst>
     <p:ext uri="{521415D9-36F7-43E2-AB2F-B90AF26B5E84}">
       <p14:sectionLst xmlns:p14="http://schemas.microsoft.com/office/powerpoint/2010/main">
-        <p14:section name="도입" id="{d7766a1e-b905-fdbb-43f3-7e346151228b}">
+        <p14:section name="도입" id="{5e35fcfd-d749-ea97-4cc0-421099d89197}">
           <p14:sldIdLst>
             <p14:sldId id="256"/>
             <p14:sldId id="257"/>
           </p14:sldIdLst>
         </p14:section>
-        <p14:section name="개념" id="{3129815e-ae22-267d-5fd1-3865e2b8eed6}">
+        <p14:section name="개념" id="{0e84d628-0880-0473-91a6-357bb21f1aba}">
           <p14:sldIdLst>
             <p14:sldId id="258"/>
             <p14:sldId id="259"/>
@@ -134,24 +134,24 @@
             <p14:sldId id="262"/>
           </p14:sldIdLst>
         </p14:section>
-        <p14:section name="연습" id="{2046535b-b0c5-a5df-e86c-f53cc77a9ba7}">
+        <p14:section name="연습" id="{aed4a06e-30a4-2516-562c-673a71f0011c}">
           <p14:sldIdLst>
             <p14:sldId id="263"/>
             <p14:sldId id="264"/>
           </p14:sldIdLst>
         </p14:section>
-        <p14:section name="확인" id="{681e5712-c2cb-8daa-e5a3-baeed4af572e}">
+        <p14:section name="확인" id="{e2c0e104-0c8f-e48b-08a4-944f78b5fc35}">
           <p14:sldIdLst>
             <p14:sldId id="265"/>
             <p14:sldId id="266"/>
           </p14:sldIdLst>
         </p14:section>
-        <p14:section name="정리" id="{c8666280-6202-6753-e5e8-7d84d027bbd5}">
+        <p14:section name="정리" id="{8fa7a6b9-6934-2576-0c8f-bc5c481391da}">
           <p14:sldIdLst>
             <p14:sldId id="267"/>
           </p14:sldIdLst>
         </p14:section>
-        <p14:section name="보충" id="{d2433541-aeca-d7a1-576e-c24ce3247d32}">
+        <p14:section name="보충" id="{c6579ba3-db51-c6b3-ca02-da6d2b20afe2}">
           <p14:sldIdLst>
             <p14:sldId id="268"/>
           </p14:sldIdLst>
@@ -2695,7 +2695,7 @@
           <a:bodyPr wrap="square" lIns="0" tIns="0" rIns="0" bIns="0" rtlCol="0" anchor="ctr"/>
           <a:lstStyle/>
           <a:p>
-            <a:pPr algn="l" indent="0" marL="0">
+            <a:pPr eaLnBrk="0" algn="l" indent="0" marL="0">
               <a:buNone/>
             </a:pPr>
             <a:r>
@@ -2736,7 +2736,7 @@
           <a:bodyPr wrap="square" lIns="0" tIns="0" rIns="0" bIns="0" rtlCol="0" anchor="t"/>
           <a:lstStyle/>
           <a:p>
-            <a:pPr indent="0" marL="0">
+            <a:pPr eaLnBrk="0" indent="0" marL="0">
               <a:buNone/>
             </a:pPr>
             <a:r>
@@ -3181,7 +3181,7 @@
       </p:sp>
       <p:sp>
         <p:nvSpPr>
-          <p:cNvPr id="21" name="S01-figure18" descr="십 칸 틀에 7개"/>
+          <p:cNvPr id="21" name="S01-figure18" descr="1개의 십 칸 틀 중 1번째: 모두 7개"/>
           <p:cNvSpPr/>
           <p:nvPr/>
         </p:nvSpPr>
@@ -3254,7 +3254,7 @@
           <a:bodyPr wrap="square" lIns="0" tIns="0" rIns="0" bIns="0" rtlCol="0" anchor="ctr"/>
           <a:lstStyle/>
           <a:p>
-            <a:pPr indent="0" marL="0">
+            <a:pPr eaLnBrk="0" indent="0" marL="0">
               <a:spcAft>
                 <a:spcPts val="600"/>
               </a:spcAft>
@@ -3274,7 +3274,7 @@
             <a:endParaRPr lang="ko-KR" sz="3200" dirty="0"/>
           </a:p>
           <a:p>
-            <a:pPr indent="0" marL="0">
+            <a:pPr eaLnBrk="0" indent="0" marL="0">
               <a:spcAft>
                 <a:spcPts val="600"/>
               </a:spcAft>
@@ -3294,7 +3294,7 @@
             <a:endParaRPr lang="ko-KR" sz="3200" dirty="0"/>
           </a:p>
           <a:p>
-            <a:pPr indent="0" marL="0">
+            <a:pPr eaLnBrk="0" indent="0" marL="0">
               <a:spcAft>
                 <a:spcPts val="600"/>
               </a:spcAft>
@@ -3363,7 +3363,7 @@
           <a:bodyPr wrap="square" lIns="0" tIns="0" rIns="0" bIns="0" rtlCol="0" anchor="ctr"/>
           <a:lstStyle/>
           <a:p>
-            <a:pPr algn="l" indent="0" marL="0">
+            <a:pPr eaLnBrk="0" algn="l" indent="0" marL="0">
               <a:buNone/>
             </a:pPr>
             <a:r>
@@ -3402,7 +3402,7 @@
           <a:bodyPr wrap="square" lIns="0" tIns="0" rIns="0" bIns="0" rtlCol="0" anchor="ctr"/>
           <a:lstStyle/>
           <a:p>
-            <a:pPr algn="l" indent="0" marL="0">
+            <a:pPr eaLnBrk="0" algn="l" indent="0" marL="0">
               <a:buNone/>
             </a:pPr>
             <a:r>
@@ -3449,7 +3449,7 @@
           <a:bodyPr wrap="square" lIns="0" tIns="0" rIns="0" bIns="0" rtlCol="0" anchor="ctr"/>
           <a:lstStyle/>
           <a:p>
-            <a:pPr algn="ctr" indent="0" marL="0">
+            <a:pPr eaLnBrk="0" algn="ctr" indent="0" marL="0">
               <a:buNone/>
             </a:pPr>
             <a:r>
@@ -3488,7 +3488,7 @@
           <a:bodyPr wrap="square" lIns="0" tIns="0" rIns="0" bIns="0" rtlCol="0" anchor="ctr"/>
           <a:lstStyle/>
           <a:p>
-            <a:pPr algn="l" indent="0" marL="0">
+            <a:pPr eaLnBrk="0" algn="l" indent="0" marL="0">
               <a:buNone/>
             </a:pPr>
             <a:r>
@@ -3535,7 +3535,7 @@
           <a:bodyPr wrap="square" lIns="0" tIns="0" rIns="0" bIns="0" rtlCol="0" anchor="ctr"/>
           <a:lstStyle/>
           <a:p>
-            <a:pPr algn="ctr" indent="0" marL="0">
+            <a:pPr eaLnBrk="0" algn="ctr" indent="0" marL="0">
               <a:buNone/>
             </a:pPr>
             <a:r>
@@ -3574,7 +3574,7 @@
           <a:bodyPr wrap="square" lIns="0" tIns="0" rIns="0" bIns="0" rtlCol="0" anchor="ctr"/>
           <a:lstStyle/>
           <a:p>
-            <a:pPr algn="l" indent="0" marL="0">
+            <a:pPr eaLnBrk="0" algn="l" indent="0" marL="0">
               <a:buNone/>
             </a:pPr>
             <a:r>
@@ -3621,7 +3621,7 @@
           <a:bodyPr wrap="square" lIns="0" tIns="0" rIns="0" bIns="0" rtlCol="0" anchor="ctr"/>
           <a:lstStyle/>
           <a:p>
-            <a:pPr algn="ctr" indent="0" marL="0">
+            <a:pPr eaLnBrk="0" algn="ctr" indent="0" marL="0">
               <a:buNone/>
             </a:pPr>
             <a:r>
@@ -3660,7 +3660,7 @@
           <a:bodyPr wrap="square" lIns="0" tIns="0" rIns="0" bIns="0" rtlCol="0" anchor="ctr"/>
           <a:lstStyle/>
           <a:p>
-            <a:pPr algn="l" indent="0" marL="0">
+            <a:pPr eaLnBrk="0" algn="l" indent="0" marL="0">
               <a:buNone/>
             </a:pPr>
             <a:r>
@@ -3717,7 +3717,7 @@
             </a:lvl1pPr>
           </a:lstStyle>
           <a:p>
-            <a:pPr algn="r"/>
+            <a:pPr eaLnBrk="0" algn="r"/>
             <a:fld id="{F7021451-1387-4CA6-816F-3879F97B5CBC}" type="slidenum">
               <a:rPr b="0" lang="en-US"/>
               <a:t>10</a:t>
@@ -3774,7 +3774,7 @@
           <a:bodyPr wrap="square" lIns="0" tIns="0" rIns="0" bIns="0" rtlCol="0" anchor="ctr"/>
           <a:lstStyle/>
           <a:p>
-            <a:pPr algn="l" indent="0" marL="0">
+            <a:pPr eaLnBrk="0" algn="l" indent="0" marL="0">
               <a:buNone/>
             </a:pPr>
             <a:r>
@@ -3840,7 +3840,7 @@
           <a:bodyPr wrap="square" lIns="0" tIns="0" rIns="0" bIns="0" rtlCol="0" anchor="ctr"/>
           <a:lstStyle/>
           <a:p>
-            <a:pPr indent="0" marL="0">
+            <a:pPr eaLnBrk="0" indent="0" marL="0">
               <a:spcAft>
                 <a:spcPts val="600"/>
               </a:spcAft>
@@ -3890,7 +3890,7 @@
           <a:bodyPr wrap="square" lIns="0" tIns="0" rIns="0" bIns="0" rtlCol="0" anchor="ctr"/>
           <a:lstStyle/>
           <a:p>
-            <a:pPr algn="ctr" indent="0" marL="0">
+            <a:pPr eaLnBrk="0" algn="ctr" indent="0" marL="0">
               <a:buNone/>
             </a:pPr>
             <a:r>
@@ -4310,7 +4310,7 @@
       </p:sp>
       <p:sp>
         <p:nvSpPr>
-          <p:cNvPr id="22" name="S11-figure277" descr="십 칸 틀에 6개"/>
+          <p:cNvPr id="22" name="S11-figure277" descr="1개의 십 칸 틀 중 1번째: 모두 6개"/>
           <p:cNvSpPr/>
           <p:nvPr/>
         </p:nvSpPr>
@@ -4364,7 +4364,7 @@
           <a:bodyPr wrap="square" lIns="0" tIns="0" rIns="0" bIns="0" rtlCol="0" anchor="ctr"/>
           <a:lstStyle/>
           <a:p>
-            <a:pPr algn="ctr" indent="0" marL="0">
+            <a:pPr eaLnBrk="0" algn="ctr" indent="0" marL="0">
               <a:buNone/>
             </a:pPr>
             <a:r>
@@ -4859,7 +4859,7 @@
       </p:sp>
       <p:sp>
         <p:nvSpPr>
-          <p:cNvPr id="43" name="S11-figure298" descr="십 칸 틀에 9개"/>
+          <p:cNvPr id="43" name="S11-figure298" descr="1개의 십 칸 틀 중 1번째: 모두 9개"/>
           <p:cNvSpPr/>
           <p:nvPr/>
         </p:nvSpPr>
@@ -4913,7 +4913,7 @@
           <a:bodyPr wrap="square" lIns="0" tIns="0" rIns="0" bIns="0" rtlCol="0" anchor="ctr"/>
           <a:lstStyle/>
           <a:p>
-            <a:pPr algn="ctr" indent="0" marL="0">
+            <a:pPr eaLnBrk="0" algn="ctr" indent="0" marL="0">
               <a:buNone/>
             </a:pPr>
             <a:r>
@@ -5124,7 +5124,7 @@
             </a:lvl1pPr>
           </a:lstStyle>
           <a:p>
-            <a:pPr algn="r"/>
+            <a:pPr eaLnBrk="0" algn="r"/>
             <a:fld id="{F7021451-1387-4CA6-816F-3879F97B5CBC}" type="slidenum">
               <a:rPr b="0" lang="en-US"/>
               <a:t>11</a:t>
@@ -5181,7 +5181,7 @@
           <a:bodyPr wrap="square" lIns="0" tIns="0" rIns="0" bIns="0" rtlCol="0" anchor="ctr"/>
           <a:lstStyle/>
           <a:p>
-            <a:pPr algn="l" indent="0" marL="0">
+            <a:pPr eaLnBrk="0" algn="l" indent="0" marL="0">
               <a:buNone/>
             </a:pPr>
             <a:r>
@@ -5247,7 +5247,7 @@
           <a:bodyPr wrap="square" lIns="0" tIns="0" rIns="0" bIns="0" rtlCol="0" anchor="ctr"/>
           <a:lstStyle/>
           <a:p>
-            <a:pPr indent="0" marL="0">
+            <a:pPr eaLnBrk="0" indent="0" marL="0">
               <a:spcAft>
                 <a:spcPts val="600"/>
               </a:spcAft>
@@ -5297,7 +5297,7 @@
           <a:bodyPr wrap="square" lIns="177800" tIns="0" rIns="177800" bIns="0" rtlCol="0" anchor="ctr"/>
           <a:lstStyle/>
           <a:p>
-            <a:pPr algn="l" indent="0" marL="0">
+            <a:pPr eaLnBrk="0" algn="l" indent="0" marL="0">
               <a:buNone/>
             </a:pPr>
             <a:r>
@@ -5344,7 +5344,7 @@
           <a:bodyPr wrap="square" lIns="177800" tIns="0" rIns="177800" bIns="0" rtlCol="0" anchor="ctr"/>
           <a:lstStyle/>
           <a:p>
-            <a:pPr algn="l" indent="0" marL="0">
+            <a:pPr eaLnBrk="0" algn="l" indent="0" marL="0">
               <a:buNone/>
             </a:pPr>
             <a:r>
@@ -5383,7 +5383,7 @@
           <a:bodyPr wrap="square" lIns="0" tIns="0" rIns="0" bIns="0" rtlCol="0" anchor="t"/>
           <a:lstStyle/>
           <a:p>
-            <a:pPr algn="l" indent="0" marL="0">
+            <a:pPr eaLnBrk="0" algn="l" indent="0" marL="0">
               <a:buNone/>
             </a:pPr>
             <a:r>
@@ -5422,7 +5422,7 @@
           <a:bodyPr wrap="square" lIns="0" tIns="0" rIns="0" bIns="0" rtlCol="0" anchor="ctr"/>
           <a:lstStyle/>
           <a:p>
-            <a:pPr algn="l" indent="0" marL="0">
+            <a:pPr eaLnBrk="0" algn="l" indent="0" marL="0">
               <a:buNone/>
             </a:pPr>
             <a:r>
@@ -5461,7 +5461,7 @@
           <a:bodyPr wrap="square" lIns="0" tIns="0" rIns="0" bIns="0" rtlCol="0" anchor="ctr"/>
           <a:lstStyle/>
           <a:p>
-            <a:pPr algn="l" indent="0" marL="0">
+            <a:pPr eaLnBrk="0" algn="l" indent="0" marL="0">
               <a:buNone/>
             </a:pPr>
             <a:r>
@@ -5500,7 +5500,7 @@
           <a:bodyPr wrap="square" lIns="0" tIns="0" rIns="0" bIns="0" rtlCol="0" anchor="ctr"/>
           <a:lstStyle/>
           <a:p>
-            <a:pPr algn="l" indent="0" marL="0">
+            <a:pPr eaLnBrk="0" algn="l" indent="0" marL="0">
               <a:buNone/>
             </a:pPr>
             <a:r>
@@ -5539,7 +5539,7 @@
           <a:bodyPr wrap="square" lIns="0" tIns="0" rIns="0" bIns="0" rtlCol="0" anchor="ctr"/>
           <a:lstStyle/>
           <a:p>
-            <a:pPr algn="l" indent="0" marL="0">
+            <a:pPr eaLnBrk="0" algn="l" indent="0" marL="0">
               <a:buNone/>
             </a:pPr>
             <a:r>
@@ -5596,7 +5596,7 @@
             </a:lvl1pPr>
           </a:lstStyle>
           <a:p>
-            <a:pPr algn="r"/>
+            <a:pPr eaLnBrk="0" algn="r"/>
             <a:fld id="{F7021451-1387-4CA6-816F-3879F97B5CBC}" type="slidenum">
               <a:rPr b="0" lang="en-US"/>
               <a:t>12</a:t>
@@ -5653,7 +5653,7 @@
           <a:bodyPr wrap="square" lIns="0" tIns="0" rIns="0" bIns="0" rtlCol="0" anchor="ctr"/>
           <a:lstStyle/>
           <a:p>
-            <a:pPr algn="l" indent="0" marL="0">
+            <a:pPr eaLnBrk="0" algn="l" indent="0" marL="0">
               <a:buNone/>
             </a:pPr>
             <a:r>
@@ -5719,7 +5719,7 @@
           <a:bodyPr wrap="square" lIns="0" tIns="0" rIns="0" bIns="0" rtlCol="0" anchor="ctr"/>
           <a:lstStyle/>
           <a:p>
-            <a:pPr indent="0" marL="0">
+            <a:pPr eaLnBrk="0" indent="0" marL="0">
               <a:spcAft>
                 <a:spcPts val="600"/>
               </a:spcAft>
@@ -5890,7 +5890,7 @@
           <a:bodyPr wrap="square" lIns="0" tIns="0" rIns="0" bIns="0" rtlCol="0" anchor="ctr"/>
           <a:lstStyle/>
           <a:p>
-            <a:pPr algn="ctr" indent="0" marL="0">
+            <a:pPr eaLnBrk="0" algn="ctr" indent="0" marL="0">
               <a:buNone/>
             </a:pPr>
             <a:r>
@@ -6083,7 +6083,7 @@
           <a:bodyPr wrap="square" lIns="0" tIns="0" rIns="0" bIns="0" rtlCol="0" anchor="ctr"/>
           <a:lstStyle/>
           <a:p>
-            <a:pPr algn="ctr" indent="0" marL="0">
+            <a:pPr eaLnBrk="0" algn="ctr" indent="0" marL="0">
               <a:buNone/>
             </a:pPr>
             <a:r>
@@ -6140,7 +6140,7 @@
             </a:lvl1pPr>
           </a:lstStyle>
           <a:p>
-            <a:pPr algn="r"/>
+            <a:pPr eaLnBrk="0" algn="r"/>
             <a:fld id="{F7021451-1387-4CA6-816F-3879F97B5CBC}" type="slidenum">
               <a:rPr b="0" lang="en-US"/>
               <a:t>13</a:t>
@@ -6197,7 +6197,7 @@
           <a:bodyPr wrap="square" lIns="0" tIns="0" rIns="0" bIns="0" rtlCol="0" anchor="ctr"/>
           <a:lstStyle/>
           <a:p>
-            <a:pPr algn="l" indent="0" marL="0">
+            <a:pPr eaLnBrk="0" algn="l" indent="0" marL="0">
               <a:buNone/>
             </a:pPr>
             <a:r>
@@ -6263,7 +6263,7 @@
           <a:bodyPr wrap="square" lIns="0" tIns="0" rIns="0" bIns="0" rtlCol="0" anchor="ctr"/>
           <a:lstStyle/>
           <a:p>
-            <a:pPr indent="0" marL="0">
+            <a:pPr eaLnBrk="0" indent="0" marL="0">
               <a:spcAft>
                 <a:spcPts val="600"/>
               </a:spcAft>
@@ -6313,7 +6313,7 @@
           <a:bodyPr wrap="square" lIns="0" tIns="0" rIns="0" bIns="0" rtlCol="0" anchor="ctr"/>
           <a:lstStyle/>
           <a:p>
-            <a:pPr algn="ctr" indent="0" marL="0">
+            <a:pPr eaLnBrk="0" algn="ctr" indent="0" marL="0">
               <a:buNone/>
             </a:pPr>
             <a:r>
@@ -6489,7 +6489,7 @@
           <a:bodyPr wrap="square" lIns="0" tIns="0" rIns="0" bIns="0" rtlCol="0" anchor="ctr"/>
           <a:lstStyle/>
           <a:p>
-            <a:pPr algn="ctr" indent="0" marL="0">
+            <a:pPr eaLnBrk="0" algn="ctr" indent="0" marL="0">
               <a:buNone/>
             </a:pPr>
             <a:r>
@@ -6725,7 +6725,7 @@
             </a:lvl1pPr>
           </a:lstStyle>
           <a:p>
-            <a:pPr algn="r"/>
+            <a:pPr eaLnBrk="0" algn="r"/>
             <a:fld id="{F7021451-1387-4CA6-816F-3879F97B5CBC}" type="slidenum">
               <a:rPr b="0" lang="en-US"/>
               <a:t>2</a:t>
@@ -6782,7 +6782,7 @@
           <a:bodyPr wrap="square" lIns="0" tIns="0" rIns="0" bIns="0" rtlCol="0" anchor="ctr"/>
           <a:lstStyle/>
           <a:p>
-            <a:pPr algn="l" indent="0" marL="0">
+            <a:pPr eaLnBrk="0" algn="l" indent="0" marL="0">
               <a:buNone/>
             </a:pPr>
             <a:r>
@@ -6848,7 +6848,7 @@
           <a:bodyPr wrap="square" lIns="0" tIns="0" rIns="0" bIns="0" rtlCol="0" anchor="ctr"/>
           <a:lstStyle/>
           <a:p>
-            <a:pPr indent="0" marL="0">
+            <a:pPr eaLnBrk="0" indent="0" marL="0">
               <a:spcAft>
                 <a:spcPts val="600"/>
               </a:spcAft>
@@ -7071,7 +7071,7 @@
           <a:bodyPr wrap="square" lIns="0" tIns="0" rIns="0" bIns="0" rtlCol="0" anchor="ctr"/>
           <a:lstStyle/>
           <a:p>
-            <a:pPr indent="0" marL="0">
+            <a:pPr eaLnBrk="0" indent="0" marL="0">
               <a:spcAft>
                 <a:spcPts val="600"/>
               </a:spcAft>
@@ -7140,7 +7140,7 @@
           <a:bodyPr wrap="square" lIns="0" tIns="0" rIns="0" bIns="0" rtlCol="0" anchor="ctr"/>
           <a:lstStyle/>
           <a:p>
-            <a:pPr indent="0" marL="0">
+            <a:pPr eaLnBrk="0" indent="0" marL="0">
               <a:spcAft>
                 <a:spcPts val="600"/>
               </a:spcAft>
@@ -7200,7 +7200,7 @@
             </a:lvl1pPr>
           </a:lstStyle>
           <a:p>
-            <a:pPr algn="r"/>
+            <a:pPr eaLnBrk="0" algn="r"/>
             <a:fld id="{F7021451-1387-4CA6-816F-3879F97B5CBC}" type="slidenum">
               <a:rPr b="0" lang="en-US"/>
               <a:t>3</a:t>
@@ -7257,7 +7257,7 @@
           <a:bodyPr wrap="square" lIns="0" tIns="0" rIns="0" bIns="0" rtlCol="0" anchor="ctr"/>
           <a:lstStyle/>
           <a:p>
-            <a:pPr algn="l" indent="0" marL="0">
+            <a:pPr eaLnBrk="0" algn="l" indent="0" marL="0">
               <a:buNone/>
             </a:pPr>
             <a:r>
@@ -7323,7 +7323,7 @@
           <a:bodyPr wrap="square" lIns="0" tIns="0" rIns="0" bIns="0" rtlCol="0" anchor="ctr"/>
           <a:lstStyle/>
           <a:p>
-            <a:pPr indent="0" marL="0">
+            <a:pPr eaLnBrk="0" indent="0" marL="0">
               <a:spcAft>
                 <a:spcPts val="600"/>
               </a:spcAft>
@@ -7419,7 +7419,7 @@
           <a:bodyPr wrap="square" lIns="0" tIns="0" rIns="0" bIns="0" rtlCol="0" anchor="ctr"/>
           <a:lstStyle/>
           <a:p>
-            <a:pPr algn="ctr" indent="0" marL="0">
+            <a:pPr eaLnBrk="0" algn="ctr" indent="0" marL="0">
               <a:buNone/>
             </a:pPr>
             <a:r>
@@ -7537,7 +7537,7 @@
           <a:bodyPr wrap="square" lIns="0" tIns="0" rIns="0" bIns="0" rtlCol="0" anchor="ctr"/>
           <a:lstStyle/>
           <a:p>
-            <a:pPr algn="ctr" indent="0" marL="0">
+            <a:pPr eaLnBrk="0" algn="ctr" indent="0" marL="0">
               <a:buNone/>
             </a:pPr>
             <a:r>
@@ -7680,7 +7680,7 @@
           <a:bodyPr wrap="square" lIns="0" tIns="0" rIns="0" bIns="0" rtlCol="0" anchor="ctr"/>
           <a:lstStyle/>
           <a:p>
-            <a:pPr algn="ctr" indent="0" marL="0">
+            <a:pPr eaLnBrk="0" algn="ctr" indent="0" marL="0">
               <a:buNone/>
             </a:pPr>
             <a:r>
@@ -7848,7 +7848,7 @@
           <a:bodyPr wrap="square" lIns="0" tIns="0" rIns="0" bIns="0" rtlCol="0" anchor="ctr"/>
           <a:lstStyle/>
           <a:p>
-            <a:pPr algn="ctr" indent="0" marL="0">
+            <a:pPr eaLnBrk="0" algn="ctr" indent="0" marL="0">
               <a:buNone/>
             </a:pPr>
             <a:r>
@@ -8041,7 +8041,7 @@
           <a:bodyPr wrap="square" lIns="0" tIns="0" rIns="0" bIns="0" rtlCol="0" anchor="ctr"/>
           <a:lstStyle/>
           <a:p>
-            <a:pPr algn="ctr" indent="0" marL="0">
+            <a:pPr eaLnBrk="0" algn="ctr" indent="0" marL="0">
               <a:buNone/>
             </a:pPr>
             <a:r>
@@ -8098,7 +8098,7 @@
             </a:lvl1pPr>
           </a:lstStyle>
           <a:p>
-            <a:pPr algn="r"/>
+            <a:pPr eaLnBrk="0" algn="r"/>
             <a:fld id="{F7021451-1387-4CA6-816F-3879F97B5CBC}" type="slidenum">
               <a:rPr b="0" lang="en-US"/>
               <a:t>4</a:t>
@@ -8155,7 +8155,7 @@
           <a:bodyPr wrap="square" lIns="0" tIns="0" rIns="0" bIns="0" rtlCol="0" anchor="ctr"/>
           <a:lstStyle/>
           <a:p>
-            <a:pPr algn="l" indent="0" marL="0">
+            <a:pPr eaLnBrk="0" algn="l" indent="0" marL="0">
               <a:buNone/>
             </a:pPr>
             <a:r>
@@ -8221,7 +8221,7 @@
           <a:bodyPr wrap="square" lIns="0" tIns="0" rIns="0" bIns="0" rtlCol="0" anchor="ctr"/>
           <a:lstStyle/>
           <a:p>
-            <a:pPr indent="0" marL="0">
+            <a:pPr eaLnBrk="0" indent="0" marL="0">
               <a:spcAft>
                 <a:spcPts val="600"/>
               </a:spcAft>
@@ -8644,7 +8644,7 @@
       </p:sp>
       <p:sp>
         <p:nvSpPr>
-          <p:cNvPr id="21" name="S05-figure94" descr="십 칸 틀에 6개"/>
+          <p:cNvPr id="21" name="S05-figure94" descr="1개의 십 칸 틀 중 1번째: 모두 6개"/>
           <p:cNvSpPr/>
           <p:nvPr/>
         </p:nvSpPr>
@@ -8690,7 +8690,7 @@
           <a:bodyPr wrap="square" lIns="0" tIns="0" rIns="0" bIns="0" rtlCol="0" anchor="ctr"/>
           <a:lstStyle/>
           <a:p>
-            <a:pPr algn="ctr" indent="0" marL="0">
+            <a:pPr eaLnBrk="0" algn="ctr" indent="0" marL="0">
               <a:buNone/>
             </a:pPr>
             <a:r>
@@ -9135,7 +9135,7 @@
       </p:sp>
       <p:sp>
         <p:nvSpPr>
-          <p:cNvPr id="40" name="S05-figure113" descr="십 칸 틀에 7개"/>
+          <p:cNvPr id="40" name="S05-figure113" descr="1개의 십 칸 틀 중 1번째: 모두 7개"/>
           <p:cNvSpPr/>
           <p:nvPr/>
         </p:nvSpPr>
@@ -9181,7 +9181,7 @@
           <a:bodyPr wrap="square" lIns="0" tIns="0" rIns="0" bIns="0" rtlCol="0" anchor="ctr"/>
           <a:lstStyle/>
           <a:p>
-            <a:pPr algn="ctr" indent="0" marL="0">
+            <a:pPr eaLnBrk="0" algn="ctr" indent="0" marL="0">
               <a:buNone/>
             </a:pPr>
             <a:r>
@@ -9651,7 +9651,7 @@
       </p:sp>
       <p:sp>
         <p:nvSpPr>
-          <p:cNvPr id="60" name="S05-figure133" descr="십 칸 틀에 8개"/>
+          <p:cNvPr id="60" name="S05-figure133" descr="1개의 십 칸 틀 중 1번째: 모두 8개"/>
           <p:cNvSpPr/>
           <p:nvPr/>
         </p:nvSpPr>
@@ -9697,7 +9697,7 @@
           <a:bodyPr wrap="square" lIns="0" tIns="0" rIns="0" bIns="0" rtlCol="0" anchor="ctr"/>
           <a:lstStyle/>
           <a:p>
-            <a:pPr algn="ctr" indent="0" marL="0">
+            <a:pPr eaLnBrk="0" algn="ctr" indent="0" marL="0">
               <a:buNone/>
             </a:pPr>
             <a:r>
@@ -10192,7 +10192,7 @@
       </p:sp>
       <p:sp>
         <p:nvSpPr>
-          <p:cNvPr id="81" name="S05-figure154" descr="십 칸 틀에 9개"/>
+          <p:cNvPr id="81" name="S05-figure154" descr="1개의 십 칸 틀 중 1번째: 모두 9개"/>
           <p:cNvSpPr/>
           <p:nvPr/>
         </p:nvSpPr>
@@ -10238,7 +10238,7 @@
           <a:bodyPr wrap="square" lIns="0" tIns="0" rIns="0" bIns="0" rtlCol="0" anchor="ctr"/>
           <a:lstStyle/>
           <a:p>
-            <a:pPr algn="ctr" indent="0" marL="0">
+            <a:pPr eaLnBrk="0" algn="ctr" indent="0" marL="0">
               <a:buNone/>
             </a:pPr>
             <a:r>
@@ -10295,7 +10295,7 @@
             </a:lvl1pPr>
           </a:lstStyle>
           <a:p>
-            <a:pPr algn="r"/>
+            <a:pPr eaLnBrk="0" algn="r"/>
             <a:fld id="{F7021451-1387-4CA6-816F-3879F97B5CBC}" type="slidenum">
               <a:rPr b="0" lang="en-US"/>
               <a:t>5</a:t>
@@ -10352,7 +10352,7 @@
           <a:bodyPr wrap="square" lIns="0" tIns="0" rIns="0" bIns="0" rtlCol="0" anchor="ctr"/>
           <a:lstStyle/>
           <a:p>
-            <a:pPr algn="l" indent="0" marL="0">
+            <a:pPr eaLnBrk="0" algn="l" indent="0" marL="0">
               <a:buNone/>
             </a:pPr>
             <a:r>
@@ -10418,7 +10418,7 @@
           <a:bodyPr wrap="square" lIns="0" tIns="0" rIns="0" bIns="0" rtlCol="0" anchor="ctr"/>
           <a:lstStyle/>
           <a:p>
-            <a:pPr indent="0" marL="0">
+            <a:pPr eaLnBrk="0" indent="0" marL="0">
               <a:spcAft>
                 <a:spcPts val="600"/>
               </a:spcAft>
@@ -10766,7 +10766,7 @@
       </p:sp>
       <p:sp>
         <p:nvSpPr>
-          <p:cNvPr id="18" name="S06-figure171" descr="십 칸 틀에 3개"/>
+          <p:cNvPr id="18" name="S06-figure171" descr="1개의 십 칸 틀 중 1번째: 모두 3개"/>
           <p:cNvSpPr/>
           <p:nvPr/>
         </p:nvSpPr>
@@ -10812,7 +10812,7 @@
           <a:bodyPr wrap="square" lIns="0" tIns="0" rIns="0" bIns="0" rtlCol="0" anchor="ctr"/>
           <a:lstStyle/>
           <a:p>
-            <a:pPr algn="ctr" indent="0" marL="0">
+            <a:pPr eaLnBrk="0" algn="ctr" indent="0" marL="0">
               <a:buNone/>
             </a:pPr>
             <a:r>
@@ -11082,7 +11082,7 @@
       </p:sp>
       <p:sp>
         <p:nvSpPr>
-          <p:cNvPr id="30" name="S06-figure183" descr="십 칸 틀에 0개"/>
+          <p:cNvPr id="30" name="S06-figure183" descr="1개의 십 칸 틀 중 1번째: 모두 0개"/>
           <p:cNvSpPr/>
           <p:nvPr/>
         </p:nvSpPr>
@@ -11128,7 +11128,7 @@
           <a:bodyPr wrap="square" lIns="0" tIns="0" rIns="0" bIns="0" rtlCol="0" anchor="ctr"/>
           <a:lstStyle/>
           <a:p>
-            <a:pPr algn="ctr" indent="0" marL="0">
+            <a:pPr eaLnBrk="0" algn="ctr" indent="0" marL="0">
               <a:buNone/>
             </a:pPr>
             <a:r>
@@ -11185,7 +11185,7 @@
             </a:lvl1pPr>
           </a:lstStyle>
           <a:p>
-            <a:pPr algn="r"/>
+            <a:pPr eaLnBrk="0" algn="r"/>
             <a:fld id="{F7021451-1387-4CA6-816F-3879F97B5CBC}" type="slidenum">
               <a:rPr b="0" lang="en-US"/>
               <a:t>6</a:t>
@@ -11242,7 +11242,7 @@
           <a:bodyPr wrap="square" lIns="0" tIns="0" rIns="0" bIns="0" rtlCol="0" anchor="ctr"/>
           <a:lstStyle/>
           <a:p>
-            <a:pPr algn="l" indent="0" marL="0">
+            <a:pPr eaLnBrk="0" algn="l" indent="0" marL="0">
               <a:buNone/>
             </a:pPr>
             <a:r>
@@ -11289,7 +11289,7 @@
           <a:bodyPr wrap="square" lIns="0" tIns="0" rIns="0" bIns="0" rtlCol="0" anchor="ctr"/>
           <a:lstStyle/>
           <a:p>
-            <a:pPr algn="ctr" indent="0" marL="0">
+            <a:pPr eaLnBrk="0" algn="ctr" indent="0" marL="0">
               <a:buNone/>
             </a:pPr>
             <a:r>
@@ -11336,7 +11336,7 @@
           <a:bodyPr wrap="square" lIns="0" tIns="0" rIns="0" bIns="0" rtlCol="0" anchor="ctr"/>
           <a:lstStyle/>
           <a:p>
-            <a:pPr algn="ctr" indent="0" marL="0">
+            <a:pPr eaLnBrk="0" algn="ctr" indent="0" marL="0">
               <a:buNone/>
             </a:pPr>
             <a:r>
@@ -11383,7 +11383,7 @@
           <a:bodyPr wrap="square" lIns="0" tIns="0" rIns="0" bIns="0" rtlCol="0" anchor="ctr"/>
           <a:lstStyle/>
           <a:p>
-            <a:pPr algn="ctr" indent="0" marL="0">
+            <a:pPr eaLnBrk="0" algn="ctr" indent="0" marL="0">
               <a:buNone/>
             </a:pPr>
             <a:r>
@@ -11430,7 +11430,7 @@
           <a:bodyPr wrap="square" lIns="0" tIns="0" rIns="0" bIns="0" rtlCol="0" anchor="ctr"/>
           <a:lstStyle/>
           <a:p>
-            <a:pPr algn="ctr" indent="0" marL="0">
+            <a:pPr eaLnBrk="0" algn="ctr" indent="0" marL="0">
               <a:buNone/>
             </a:pPr>
             <a:r>
@@ -11477,7 +11477,7 @@
           <a:bodyPr wrap="square" lIns="0" tIns="0" rIns="0" bIns="0" rtlCol="0" anchor="ctr"/>
           <a:lstStyle/>
           <a:p>
-            <a:pPr algn="ctr" indent="0" marL="0">
+            <a:pPr eaLnBrk="0" algn="ctr" indent="0" marL="0">
               <a:buNone/>
             </a:pPr>
             <a:r>
@@ -11524,7 +11524,7 @@
           <a:bodyPr wrap="square" lIns="0" tIns="0" rIns="0" bIns="0" rtlCol="0" anchor="ctr"/>
           <a:lstStyle/>
           <a:p>
-            <a:pPr algn="ctr" indent="0" marL="0">
+            <a:pPr eaLnBrk="0" algn="ctr" indent="0" marL="0">
               <a:buNone/>
             </a:pPr>
             <a:r>
@@ -11571,7 +11571,7 @@
           <a:bodyPr wrap="square" lIns="0" tIns="0" rIns="0" bIns="0" rtlCol="0" anchor="ctr"/>
           <a:lstStyle/>
           <a:p>
-            <a:pPr algn="ctr" indent="0" marL="0">
+            <a:pPr eaLnBrk="0" algn="ctr" indent="0" marL="0">
               <a:buNone/>
             </a:pPr>
             <a:r>
@@ -11618,7 +11618,7 @@
           <a:bodyPr wrap="square" lIns="0" tIns="0" rIns="0" bIns="0" rtlCol="0" anchor="ctr"/>
           <a:lstStyle/>
           <a:p>
-            <a:pPr algn="ctr" indent="0" marL="0">
+            <a:pPr eaLnBrk="0" algn="ctr" indent="0" marL="0">
               <a:buNone/>
             </a:pPr>
             <a:r>
@@ -11665,7 +11665,7 @@
           <a:bodyPr wrap="square" lIns="0" tIns="0" rIns="0" bIns="0" rtlCol="0" anchor="ctr"/>
           <a:lstStyle/>
           <a:p>
-            <a:pPr algn="ctr" indent="0" marL="0">
+            <a:pPr eaLnBrk="0" algn="ctr" indent="0" marL="0">
               <a:buNone/>
             </a:pPr>
             <a:r>
@@ -11712,7 +11712,7 @@
           <a:bodyPr wrap="square" lIns="0" tIns="0" rIns="0" bIns="0" rtlCol="0" anchor="ctr"/>
           <a:lstStyle/>
           <a:p>
-            <a:pPr algn="ctr" indent="0" marL="0">
+            <a:pPr eaLnBrk="0" algn="ctr" indent="0" marL="0">
               <a:buNone/>
             </a:pPr>
             <a:r>
@@ -11757,7 +11757,7 @@
           <a:bodyPr wrap="square" lIns="0" tIns="0" rIns="0" bIns="0" rtlCol="0" anchor="ctr"/>
           <a:lstStyle/>
           <a:p>
-            <a:pPr algn="ctr" indent="0" marL="0">
+            <a:pPr eaLnBrk="0" algn="ctr" indent="0" marL="0">
               <a:buNone/>
             </a:pPr>
             <a:r>
@@ -11796,7 +11796,7 @@
           <a:bodyPr wrap="square" lIns="0" tIns="0" rIns="0" bIns="0" rtlCol="0" anchor="t"/>
           <a:lstStyle/>
           <a:p>
-            <a:pPr algn="l" indent="0" marL="0">
+            <a:pPr eaLnBrk="0" algn="l" indent="0" marL="0">
               <a:buNone/>
             </a:pPr>
             <a:r>
@@ -11841,7 +11841,7 @@
           <a:bodyPr wrap="square" lIns="0" tIns="0" rIns="0" bIns="0" rtlCol="0" anchor="ctr"/>
           <a:lstStyle/>
           <a:p>
-            <a:pPr algn="ctr" indent="0" marL="0">
+            <a:pPr eaLnBrk="0" algn="ctr" indent="0" marL="0">
               <a:buNone/>
             </a:pPr>
             <a:r>
@@ -11880,7 +11880,7 @@
           <a:bodyPr wrap="square" lIns="0" tIns="0" rIns="0" bIns="0" rtlCol="0" anchor="t"/>
           <a:lstStyle/>
           <a:p>
-            <a:pPr algn="l" indent="0" marL="0">
+            <a:pPr eaLnBrk="0" algn="l" indent="0" marL="0">
               <a:buNone/>
             </a:pPr>
             <a:r>
@@ -11925,7 +11925,7 @@
           <a:bodyPr wrap="square" lIns="0" tIns="0" rIns="0" bIns="0" rtlCol="0" anchor="ctr"/>
           <a:lstStyle/>
           <a:p>
-            <a:pPr algn="ctr" indent="0" marL="0">
+            <a:pPr eaLnBrk="0" algn="ctr" indent="0" marL="0">
               <a:buNone/>
             </a:pPr>
             <a:r>
@@ -11964,7 +11964,7 @@
           <a:bodyPr wrap="square" lIns="0" tIns="0" rIns="0" bIns="0" rtlCol="0" anchor="t"/>
           <a:lstStyle/>
           <a:p>
-            <a:pPr algn="l" indent="0" marL="0">
+            <a:pPr eaLnBrk="0" algn="l" indent="0" marL="0">
               <a:buNone/>
             </a:pPr>
             <a:r>
@@ -12021,7 +12021,7 @@
             </a:lvl1pPr>
           </a:lstStyle>
           <a:p>
-            <a:pPr algn="r"/>
+            <a:pPr eaLnBrk="0" algn="r"/>
             <a:fld id="{F7021451-1387-4CA6-816F-3879F97B5CBC}" type="slidenum">
               <a:rPr b="0" lang="en-US"/>
               <a:t>7</a:t>
@@ -12078,7 +12078,7 @@
           <a:bodyPr wrap="square" lIns="0" tIns="0" rIns="0" bIns="0" rtlCol="0" anchor="ctr"/>
           <a:lstStyle/>
           <a:p>
-            <a:pPr algn="l" indent="0" marL="0">
+            <a:pPr eaLnBrk="0" algn="l" indent="0" marL="0">
               <a:buNone/>
             </a:pPr>
             <a:r>
@@ -12117,7 +12117,7 @@
           <a:bodyPr wrap="square" lIns="0" tIns="0" rIns="0" bIns="0" rtlCol="0" anchor="ctr"/>
           <a:lstStyle/>
           <a:p>
-            <a:pPr algn="l" indent="0" marL="0">
+            <a:pPr eaLnBrk="0" algn="l" indent="0" marL="0">
               <a:buNone/>
             </a:pPr>
             <a:r>
@@ -12183,7 +12183,7 @@
           <a:bodyPr wrap="square" lIns="0" tIns="0" rIns="0" bIns="0" rtlCol="0" anchor="ctr"/>
           <a:lstStyle/>
           <a:p>
-            <a:pPr indent="0" marL="0">
+            <a:pPr eaLnBrk="0" indent="0" marL="0">
               <a:spcAft>
                 <a:spcPts val="600"/>
               </a:spcAft>
@@ -12233,7 +12233,7 @@
           <a:bodyPr wrap="square" lIns="0" tIns="0" rIns="0" bIns="0" rtlCol="0" anchor="ctr"/>
           <a:lstStyle/>
           <a:p>
-            <a:pPr algn="ctr" indent="0" marL="0">
+            <a:pPr eaLnBrk="0" algn="ctr" indent="0" marL="0">
               <a:buNone/>
             </a:pPr>
             <a:r>
@@ -12509,7 +12509,7 @@
           <a:bodyPr wrap="square" lIns="0" tIns="0" rIns="0" bIns="0" rtlCol="0" anchor="ctr"/>
           <a:lstStyle/>
           <a:p>
-            <a:pPr algn="ctr" indent="0" marL="0">
+            <a:pPr eaLnBrk="0" algn="ctr" indent="0" marL="0">
               <a:buNone/>
             </a:pPr>
             <a:r>
@@ -12660,7 +12660,7 @@
           <a:bodyPr wrap="square" lIns="0" tIns="0" rIns="0" bIns="0" rtlCol="0" anchor="ctr"/>
           <a:lstStyle/>
           <a:p>
-            <a:pPr algn="ctr" indent="0" marL="0">
+            <a:pPr eaLnBrk="0" algn="ctr" indent="0" marL="0">
               <a:buNone/>
             </a:pPr>
             <a:r>
@@ -13080,7 +13080,7 @@
       </p:sp>
       <p:sp>
         <p:nvSpPr>
-          <p:cNvPr id="38" name="S08-figure236" descr="십 칸 틀에 6개"/>
+          <p:cNvPr id="38" name="S08-figure236" descr="1개의 십 칸 틀 중 1번째: 모두 6개"/>
           <p:cNvSpPr/>
           <p:nvPr/>
         </p:nvSpPr>
@@ -13144,7 +13144,7 @@
             </a:lvl1pPr>
           </a:lstStyle>
           <a:p>
-            <a:pPr algn="r"/>
+            <a:pPr eaLnBrk="0" algn="r"/>
             <a:fld id="{F7021451-1387-4CA6-816F-3879F97B5CBC}" type="slidenum">
               <a:rPr b="0" lang="en-US"/>
               <a:t>8</a:t>
@@ -13201,7 +13201,7 @@
           <a:bodyPr wrap="square" lIns="0" tIns="0" rIns="0" bIns="0" rtlCol="0" anchor="ctr"/>
           <a:lstStyle/>
           <a:p>
-            <a:pPr algn="l" indent="0" marL="0">
+            <a:pPr eaLnBrk="0" algn="l" indent="0" marL="0">
               <a:buNone/>
             </a:pPr>
             <a:r>
@@ -13267,7 +13267,7 @@
           <a:bodyPr wrap="square" lIns="0" tIns="0" rIns="0" bIns="0" rtlCol="0" anchor="ctr"/>
           <a:lstStyle/>
           <a:p>
-            <a:pPr indent="0" marL="0">
+            <a:pPr eaLnBrk="0" indent="0" marL="0">
               <a:spcAft>
                 <a:spcPts val="600"/>
               </a:spcAft>
@@ -13336,7 +13336,7 @@
           <a:bodyPr wrap="square" lIns="0" tIns="0" rIns="0" bIns="0" rtlCol="0" anchor="ctr"/>
           <a:lstStyle/>
           <a:p>
-            <a:pPr indent="0" marL="0">
+            <a:pPr eaLnBrk="0" indent="0" marL="0">
               <a:spcAft>
                 <a:spcPts val="600"/>
               </a:spcAft>
@@ -13386,7 +13386,7 @@
           <a:bodyPr wrap="square" lIns="177800" tIns="0" rIns="177800" bIns="0" rtlCol="0" anchor="ctr"/>
           <a:lstStyle/>
           <a:p>
-            <a:pPr algn="l" indent="0" marL="0">
+            <a:pPr eaLnBrk="0" algn="l" indent="0" marL="0">
               <a:buNone/>
             </a:pPr>
             <a:r>
@@ -13425,7 +13425,7 @@
           <a:bodyPr wrap="square" lIns="0" tIns="0" rIns="0" bIns="0" rtlCol="0" anchor="t"/>
           <a:lstStyle/>
           <a:p>
-            <a:pPr algn="l" indent="0" marL="0">
+            <a:pPr eaLnBrk="0" algn="l" indent="0" marL="0">
               <a:buNone/>
             </a:pPr>
             <a:r>
@@ -13472,7 +13472,7 @@
           <a:bodyPr wrap="square" lIns="177800" tIns="0" rIns="177800" bIns="0" rtlCol="0" anchor="ctr"/>
           <a:lstStyle/>
           <a:p>
-            <a:pPr algn="l" indent="0" marL="0">
+            <a:pPr eaLnBrk="0" algn="l" indent="0" marL="0">
               <a:buNone/>
             </a:pPr>
             <a:r>
@@ -13665,7 +13665,7 @@
           <a:bodyPr wrap="square" lIns="0" tIns="0" rIns="0" bIns="0" rtlCol="0" anchor="t"/>
           <a:lstStyle/>
           <a:p>
-            <a:pPr algn="l" indent="0" marL="0">
+            <a:pPr eaLnBrk="0" algn="l" indent="0" marL="0">
               <a:buNone/>
             </a:pPr>
             <a:r>
@@ -13722,7 +13722,7 @@
             </a:lvl1pPr>
           </a:lstStyle>
           <a:p>
-            <a:pPr algn="r"/>
+            <a:pPr eaLnBrk="0" algn="r"/>
             <a:fld id="{F7021451-1387-4CA6-816F-3879F97B5CBC}" type="slidenum">
               <a:rPr b="0" lang="en-US"/>
               <a:t>9</a:t>

--- a/dist/초1/수학/수와연산/초1_수학_수와연산_01_9까지의수_학생용.pptx
+++ b/dist/초1/수학/수와연산/초1_수학_수와연산_01_9까지의수_학생용.pptx
@@ -119,13 +119,13 @@
   <p:extLst>
     <p:ext uri="{521415D9-36F7-43E2-AB2F-B90AF26B5E84}">
       <p14:sectionLst xmlns:p14="http://schemas.microsoft.com/office/powerpoint/2010/main">
-        <p14:section name="도입" id="{5e35fcfd-d749-ea97-4cc0-421099d89197}">
+        <p14:section name="도입" id="{95556fa2-4a32-e7f1-2b6b-f17129eafe01}">
           <p14:sldIdLst>
             <p14:sldId id="256"/>
             <p14:sldId id="257"/>
           </p14:sldIdLst>
         </p14:section>
-        <p14:section name="개념" id="{0e84d628-0880-0473-91a6-357bb21f1aba}">
+        <p14:section name="개념" id="{e3dacea6-3f0e-ded8-71db-71758ef1d7ef}">
           <p14:sldIdLst>
             <p14:sldId id="258"/>
             <p14:sldId id="259"/>
@@ -134,24 +134,24 @@
             <p14:sldId id="262"/>
           </p14:sldIdLst>
         </p14:section>
-        <p14:section name="연습" id="{aed4a06e-30a4-2516-562c-673a71f0011c}">
+        <p14:section name="연습" id="{ea9d29ef-4e4e-2e80-89b8-d5304ec114c3}">
           <p14:sldIdLst>
             <p14:sldId id="263"/>
             <p14:sldId id="264"/>
           </p14:sldIdLst>
         </p14:section>
-        <p14:section name="확인" id="{e2c0e104-0c8f-e48b-08a4-944f78b5fc35}">
+        <p14:section name="확인" id="{9e50fa36-492a-3f20-f0b6-4d0a158f9eb0}">
           <p14:sldIdLst>
             <p14:sldId id="265"/>
             <p14:sldId id="266"/>
           </p14:sldIdLst>
         </p14:section>
-        <p14:section name="정리" id="{8fa7a6b9-6934-2576-0c8f-bc5c481391da}">
+        <p14:section name="정리" id="{a56ed4d5-dbca-621b-a26e-6e7cc0efe87c}">
           <p14:sldIdLst>
             <p14:sldId id="267"/>
           </p14:sldIdLst>
         </p14:section>
-        <p14:section name="보충" id="{c6579ba3-db51-c6b3-ca02-da6d2b20afe2}">
+        <p14:section name="보충" id="{00a471ea-1abe-81fe-f584-2a15be0d3a26}">
           <p14:sldIdLst>
             <p14:sldId id="268"/>
           </p14:sldIdLst>
@@ -12259,7 +12259,7 @@
         </p:nvSpPr>
         <p:spPr>
           <a:xfrm>
-            <a:off x="2619756" y="2098548"/>
+            <a:off x="3259836" y="2098548"/>
             <a:ext cx="283464" cy="283464"/>
           </a:xfrm>
           <a:prstGeom prst="ellipse">
@@ -12284,7 +12284,7 @@
         </p:nvSpPr>
         <p:spPr>
           <a:xfrm>
-            <a:off x="3076956" y="2098548"/>
+            <a:off x="3717036" y="2098548"/>
             <a:ext cx="283464" cy="283464"/>
           </a:xfrm>
           <a:prstGeom prst="ellipse">
@@ -12309,7 +12309,7 @@
         </p:nvSpPr>
         <p:spPr>
           <a:xfrm>
-            <a:off x="3534156" y="2098548"/>
+            <a:off x="4174236" y="2098548"/>
             <a:ext cx="283464" cy="283464"/>
           </a:xfrm>
           <a:prstGeom prst="ellipse">
@@ -12334,7 +12334,7 @@
         </p:nvSpPr>
         <p:spPr>
           <a:xfrm>
-            <a:off x="3991356" y="2098548"/>
+            <a:off x="4631436" y="2098548"/>
             <a:ext cx="283464" cy="283464"/>
           </a:xfrm>
           <a:prstGeom prst="ellipse">
@@ -12359,7 +12359,7 @@
         </p:nvSpPr>
         <p:spPr>
           <a:xfrm>
-            <a:off x="2619756" y="2555748"/>
+            <a:off x="3259836" y="2555748"/>
             <a:ext cx="283464" cy="283464"/>
           </a:xfrm>
           <a:prstGeom prst="ellipse">
@@ -12384,7 +12384,7 @@
         </p:nvSpPr>
         <p:spPr>
           <a:xfrm>
-            <a:off x="3076956" y="2555748"/>
+            <a:off x="3717036" y="2555748"/>
             <a:ext cx="283464" cy="283464"/>
           </a:xfrm>
           <a:prstGeom prst="ellipse">
@@ -12409,7 +12409,7 @@
         </p:nvSpPr>
         <p:spPr>
           <a:xfrm>
-            <a:off x="3534156" y="2555748"/>
+            <a:off x="4174236" y="2555748"/>
             <a:ext cx="283464" cy="283464"/>
           </a:xfrm>
           <a:prstGeom prst="ellipse">
@@ -12434,7 +12434,7 @@
         </p:nvSpPr>
         <p:spPr>
           <a:xfrm>
-            <a:off x="3991356" y="2555748"/>
+            <a:off x="4631436" y="2555748"/>
             <a:ext cx="283464" cy="283464"/>
           </a:xfrm>
           <a:prstGeom prst="ellipse">
@@ -12459,7 +12459,7 @@
         </p:nvSpPr>
         <p:spPr>
           <a:xfrm>
-            <a:off x="2532888" y="2011680"/>
+            <a:off x="3172968" y="2011680"/>
             <a:ext cx="1828800" cy="914400"/>
           </a:xfrm>
           <a:prstGeom prst="rect">
@@ -12535,7 +12535,7 @@
         </p:nvSpPr>
         <p:spPr>
           <a:xfrm>
-            <a:off x="2548890" y="3353562"/>
+            <a:off x="3188970" y="3353562"/>
             <a:ext cx="425196" cy="425196"/>
           </a:xfrm>
           <a:prstGeom prst="ellipse">
@@ -12560,7 +12560,7 @@
         </p:nvSpPr>
         <p:spPr>
           <a:xfrm>
-            <a:off x="3234690" y="3353562"/>
+            <a:off x="3874770" y="3353562"/>
             <a:ext cx="425196" cy="425196"/>
           </a:xfrm>
           <a:prstGeom prst="ellipse">
@@ -12585,7 +12585,7 @@
         </p:nvSpPr>
         <p:spPr>
           <a:xfrm>
-            <a:off x="3920490" y="3353562"/>
+            <a:off x="4560570" y="3353562"/>
             <a:ext cx="425196" cy="425196"/>
           </a:xfrm>
           <a:prstGeom prst="ellipse">
@@ -12610,7 +12610,7 @@
         </p:nvSpPr>
         <p:spPr>
           <a:xfrm>
-            <a:off x="2418588" y="3223260"/>
+            <a:off x="3058668" y="3223260"/>
             <a:ext cx="2057400" cy="685800"/>
           </a:xfrm>
           <a:prstGeom prst="rect">
@@ -12686,7 +12686,7 @@
         </p:nvSpPr>
         <p:spPr>
           <a:xfrm>
-            <a:off x="2304288" y="4206240"/>
+            <a:off x="2944368" y="4206240"/>
             <a:ext cx="457200" cy="457200"/>
           </a:xfrm>
           <a:prstGeom prst="rect">
@@ -12711,7 +12711,7 @@
         </p:nvSpPr>
         <p:spPr>
           <a:xfrm>
-            <a:off x="2382012" y="4283964"/>
+            <a:off x="3022092" y="4283964"/>
             <a:ext cx="301752" cy="301752"/>
           </a:xfrm>
           <a:prstGeom prst="ellipse">
@@ -12736,7 +12736,7 @@
         </p:nvSpPr>
         <p:spPr>
           <a:xfrm>
-            <a:off x="2761488" y="4206240"/>
+            <a:off x="3401568" y="4206240"/>
             <a:ext cx="457200" cy="457200"/>
           </a:xfrm>
           <a:prstGeom prst="rect">
@@ -12761,7 +12761,7 @@
         </p:nvSpPr>
         <p:spPr>
           <a:xfrm>
-            <a:off x="2839212" y="4283964"/>
+            <a:off x="3479292" y="4283964"/>
             <a:ext cx="301752" cy="301752"/>
           </a:xfrm>
           <a:prstGeom prst="ellipse">
@@ -12786,7 +12786,7 @@
         </p:nvSpPr>
         <p:spPr>
           <a:xfrm>
-            <a:off x="3218688" y="4206240"/>
+            <a:off x="3858768" y="4206240"/>
             <a:ext cx="457200" cy="457200"/>
           </a:xfrm>
           <a:prstGeom prst="rect">
@@ -12811,7 +12811,7 @@
         </p:nvSpPr>
         <p:spPr>
           <a:xfrm>
-            <a:off x="3296412" y="4283964"/>
+            <a:off x="3936492" y="4283964"/>
             <a:ext cx="301752" cy="301752"/>
           </a:xfrm>
           <a:prstGeom prst="ellipse">
@@ -12836,7 +12836,7 @@
         </p:nvSpPr>
         <p:spPr>
           <a:xfrm>
-            <a:off x="3675888" y="4206240"/>
+            <a:off x="4315968" y="4206240"/>
             <a:ext cx="457200" cy="457200"/>
           </a:xfrm>
           <a:prstGeom prst="rect">
@@ -12861,7 +12861,7 @@
         </p:nvSpPr>
         <p:spPr>
           <a:xfrm>
-            <a:off x="3753612" y="4283964"/>
+            <a:off x="4393692" y="4283964"/>
             <a:ext cx="301752" cy="301752"/>
           </a:xfrm>
           <a:prstGeom prst="ellipse">
@@ -12886,7 +12886,7 @@
         </p:nvSpPr>
         <p:spPr>
           <a:xfrm>
-            <a:off x="4133088" y="4206240"/>
+            <a:off x="4773168" y="4206240"/>
             <a:ext cx="457200" cy="457200"/>
           </a:xfrm>
           <a:prstGeom prst="rect">
@@ -12911,7 +12911,7 @@
         </p:nvSpPr>
         <p:spPr>
           <a:xfrm>
-            <a:off x="4210812" y="4283964"/>
+            <a:off x="4850892" y="4283964"/>
             <a:ext cx="301752" cy="301752"/>
           </a:xfrm>
           <a:prstGeom prst="ellipse">
@@ -12936,7 +12936,7 @@
         </p:nvSpPr>
         <p:spPr>
           <a:xfrm>
-            <a:off x="2304288" y="4663440"/>
+            <a:off x="2944368" y="4663440"/>
             <a:ext cx="457200" cy="457200"/>
           </a:xfrm>
           <a:prstGeom prst="rect">
@@ -12961,7 +12961,7 @@
         </p:nvSpPr>
         <p:spPr>
           <a:xfrm>
-            <a:off x="2382012" y="4741164"/>
+            <a:off x="3022092" y="4741164"/>
             <a:ext cx="301752" cy="301752"/>
           </a:xfrm>
           <a:prstGeom prst="ellipse">
@@ -12986,7 +12986,7 @@
         </p:nvSpPr>
         <p:spPr>
           <a:xfrm>
-            <a:off x="2761488" y="4663440"/>
+            <a:off x="3401568" y="4663440"/>
             <a:ext cx="457200" cy="457200"/>
           </a:xfrm>
           <a:prstGeom prst="rect">
@@ -13011,7 +13011,7 @@
         </p:nvSpPr>
         <p:spPr>
           <a:xfrm>
-            <a:off x="3218688" y="4663440"/>
+            <a:off x="3858768" y="4663440"/>
             <a:ext cx="457200" cy="457200"/>
           </a:xfrm>
           <a:prstGeom prst="rect">
@@ -13036,7 +13036,7 @@
         </p:nvSpPr>
         <p:spPr>
           <a:xfrm>
-            <a:off x="3675888" y="4663440"/>
+            <a:off x="4315968" y="4663440"/>
             <a:ext cx="457200" cy="457200"/>
           </a:xfrm>
           <a:prstGeom prst="rect">
@@ -13061,7 +13061,7 @@
         </p:nvSpPr>
         <p:spPr>
           <a:xfrm>
-            <a:off x="4133088" y="4663440"/>
+            <a:off x="4773168" y="4663440"/>
             <a:ext cx="457200" cy="457200"/>
           </a:xfrm>
           <a:prstGeom prst="rect">
@@ -13086,7 +13086,7 @@
         </p:nvSpPr>
         <p:spPr>
           <a:xfrm>
-            <a:off x="2304288" y="4206240"/>
+            <a:off x="2944368" y="4206240"/>
             <a:ext cx="2286000" cy="914400"/>
           </a:xfrm>
           <a:prstGeom prst="rect">

--- a/dist/초1/수학/수와연산/초1_수학_수와연산_01_9까지의수_학생용.pptx
+++ b/dist/초1/수학/수와연산/초1_수학_수와연산_01_9까지의수_학생용.pptx
@@ -119,13 +119,13 @@
   <p:extLst>
     <p:ext uri="{521415D9-36F7-43E2-AB2F-B90AF26B5E84}">
       <p14:sectionLst xmlns:p14="http://schemas.microsoft.com/office/powerpoint/2010/main">
-        <p14:section name="도입" id="{95556fa2-4a32-e7f1-2b6b-f17129eafe01}">
+        <p14:section name="도입" id="{72357740-15e5-7d82-c375-4afd1e99ca17}">
           <p14:sldIdLst>
             <p14:sldId id="256"/>
             <p14:sldId id="257"/>
           </p14:sldIdLst>
         </p14:section>
-        <p14:section name="개념" id="{e3dacea6-3f0e-ded8-71db-71758ef1d7ef}">
+        <p14:section name="개념" id="{18af646d-294d-7a8d-4e18-f788f7ce27dd}">
           <p14:sldIdLst>
             <p14:sldId id="258"/>
             <p14:sldId id="259"/>
@@ -134,24 +134,24 @@
             <p14:sldId id="262"/>
           </p14:sldIdLst>
         </p14:section>
-        <p14:section name="연습" id="{ea9d29ef-4e4e-2e80-89b8-d5304ec114c3}">
+        <p14:section name="연습" id="{56715ab5-39d0-e462-5a30-773e07f08a11}">
           <p14:sldIdLst>
             <p14:sldId id="263"/>
             <p14:sldId id="264"/>
           </p14:sldIdLst>
         </p14:section>
-        <p14:section name="확인" id="{9e50fa36-492a-3f20-f0b6-4d0a158f9eb0}">
+        <p14:section name="확인" id="{17a1f36c-a493-e16c-08af-84d4c8f1c76e}">
           <p14:sldIdLst>
             <p14:sldId id="265"/>
             <p14:sldId id="266"/>
           </p14:sldIdLst>
         </p14:section>
-        <p14:section name="정리" id="{a56ed4d5-dbca-621b-a26e-6e7cc0efe87c}">
+        <p14:section name="정리" id="{aee89339-0701-0e1b-cff4-c8d62540ec38}">
           <p14:sldIdLst>
             <p14:sldId id="267"/>
           </p14:sldIdLst>
         </p14:section>
-        <p14:section name="보충" id="{00a471ea-1abe-81fe-f584-2a15be0d3a26}">
+        <p14:section name="보충" id="{deb5cec4-86fe-ad9e-38b8-ad7f20478e5f}">
           <p14:sldIdLst>
             <p14:sldId id="268"/>
           </p14:sldIdLst>
